--- a/2021w-oop/presentation.pptx
+++ b/2021w-oop/presentation.pptx
@@ -304,7 +304,7 @@
           <a:p>
             <a:fld id="{1CE29B06-0D5F-4283-A209-3E53F12EBE96}" type="datetimeFigureOut">
               <a:rPr lang="en-US" smtClean="0"/>
-              <a:t>4/19/2021</a:t>
+              <a:t>4/8/26</a:t>
             </a:fld>
             <a:endParaRPr lang="en-US"/>
           </a:p>
@@ -409,6 +409,13 @@
             <a:schemeClr val="lt1"/>
           </a:fontRef>
         </p:style>
+        <p:txBody>
+          <a:bodyPr/>
+          <a:lstStyle/>
+          <a:p>
+            <a:endParaRPr lang="en-US"/>
+          </a:p>
+        </p:txBody>
       </p:sp>
     </p:spTree>
     <p:extLst>
@@ -532,7 +539,7 @@
           <a:p>
             <a:fld id="{1CE29B06-0D5F-4283-A209-3E53F12EBE96}" type="datetimeFigureOut">
               <a:rPr lang="en-US" smtClean="0"/>
-              <a:t>4/19/2021</a:t>
+              <a:t>4/8/26</a:t>
             </a:fld>
             <a:endParaRPr lang="en-US"/>
           </a:p>
@@ -712,7 +719,7 @@
           <a:p>
             <a:fld id="{1CE29B06-0D5F-4283-A209-3E53F12EBE96}" type="datetimeFigureOut">
               <a:rPr lang="en-US" smtClean="0"/>
-              <a:t>4/19/2021</a:t>
+              <a:t>4/8/26</a:t>
             </a:fld>
             <a:endParaRPr lang="en-US"/>
           </a:p>
@@ -882,7 +889,7 @@
           <a:p>
             <a:fld id="{1CE29B06-0D5F-4283-A209-3E53F12EBE96}" type="datetimeFigureOut">
               <a:rPr lang="en-US" smtClean="0"/>
-              <a:t>4/19/2021</a:t>
+              <a:t>4/8/26</a:t>
             </a:fld>
             <a:endParaRPr lang="en-US"/>
           </a:p>
@@ -1136,7 +1143,7 @@
           <a:p>
             <a:fld id="{1CE29B06-0D5F-4283-A209-3E53F12EBE96}" type="datetimeFigureOut">
               <a:rPr lang="en-US" smtClean="0"/>
-              <a:t>4/19/2021</a:t>
+              <a:t>4/8/26</a:t>
             </a:fld>
             <a:endParaRPr lang="en-US"/>
           </a:p>
@@ -1462,7 +1469,7 @@
           <a:p>
             <a:fld id="{1CE29B06-0D5F-4283-A209-3E53F12EBE96}" type="datetimeFigureOut">
               <a:rPr lang="en-US" smtClean="0"/>
-              <a:t>4/19/2021</a:t>
+              <a:t>4/8/26</a:t>
             </a:fld>
             <a:endParaRPr lang="en-US"/>
           </a:p>
@@ -1913,7 +1920,7 @@
           <a:p>
             <a:fld id="{1CE29B06-0D5F-4283-A209-3E53F12EBE96}" type="datetimeFigureOut">
               <a:rPr lang="en-US" smtClean="0"/>
-              <a:t>4/19/2021</a:t>
+              <a:t>4/8/26</a:t>
             </a:fld>
             <a:endParaRPr lang="en-US"/>
           </a:p>
@@ -2031,7 +2038,7 @@
           <a:p>
             <a:fld id="{1CE29B06-0D5F-4283-A209-3E53F12EBE96}" type="datetimeFigureOut">
               <a:rPr lang="en-US" smtClean="0"/>
-              <a:t>4/19/2021</a:t>
+              <a:t>4/8/26</a:t>
             </a:fld>
             <a:endParaRPr lang="en-US"/>
           </a:p>
@@ -2126,7 +2133,7 @@
           <a:p>
             <a:fld id="{1CE29B06-0D5F-4283-A209-3E53F12EBE96}" type="datetimeFigureOut">
               <a:rPr lang="en-US" smtClean="0"/>
-              <a:t>4/19/2021</a:t>
+              <a:t>4/8/26</a:t>
             </a:fld>
             <a:endParaRPr lang="en-US"/>
           </a:p>
@@ -2413,7 +2420,7 @@
           <a:p>
             <a:fld id="{1CE29B06-0D5F-4283-A209-3E53F12EBE96}" type="datetimeFigureOut">
               <a:rPr lang="en-US" smtClean="0"/>
-              <a:t>4/19/2021</a:t>
+              <a:t>4/8/26</a:t>
             </a:fld>
             <a:endParaRPr lang="en-US"/>
           </a:p>
@@ -2735,7 +2742,7 @@
           <a:p>
             <a:fld id="{1CE29B06-0D5F-4283-A209-3E53F12EBE96}" type="datetimeFigureOut">
               <a:rPr lang="en-US" smtClean="0"/>
-              <a:t>4/19/2021</a:t>
+              <a:t>4/8/26</a:t>
             </a:fld>
             <a:endParaRPr lang="en-US"/>
           </a:p>
@@ -2862,6 +2869,13 @@
             <a:schemeClr val="lt1"/>
           </a:fontRef>
         </p:style>
+        <p:txBody>
+          <a:bodyPr/>
+          <a:lstStyle/>
+          <a:p>
+            <a:endParaRPr lang="en-US"/>
+          </a:p>
+        </p:txBody>
       </p:sp>
       <p:sp>
         <p:nvSpPr>
@@ -2992,7 +3006,7 @@
           <a:p>
             <a:fld id="{1CE29B06-0D5F-4283-A209-3E53F12EBE96}" type="datetimeFigureOut">
               <a:rPr lang="en-US" smtClean="0"/>
-              <a:t>4/19/2021</a:t>
+              <a:t>4/8/26</a:t>
             </a:fld>
             <a:endParaRPr lang="en-US"/>
           </a:p>
@@ -3812,7 +3826,7 @@
                   <a:srgbClr val="FFC000"/>
                 </a:solidFill>
               </a:rPr>
-              <a:t>the UML model</a:t>
+              <a:t>the UML model (outdated as of 2026)</a:t>
             </a:r>
           </a:p>
         </p:txBody>
@@ -6558,8 +6572,21 @@
                   <a:srgbClr val="FFC000"/>
                 </a:solidFill>
               </a:rPr>
-              <a:t>using adjacency list</a:t>
-            </a:r>
+              <a:t>using adjacency list + </a:t>
+            </a:r>
+            <a:r>
+              <a:rPr lang="en-US">
+                <a:solidFill>
+                  <a:srgbClr val="FFC000"/>
+                </a:solidFill>
+              </a:rPr>
+              <a:t>graphviz</a:t>
+            </a:r>
+            <a:endParaRPr lang="en-US" dirty="0">
+              <a:solidFill>
+                <a:srgbClr val="FFC000"/>
+              </a:solidFill>
+            </a:endParaRPr>
           </a:p>
         </p:txBody>
       </p:sp>
@@ -6578,13 +6605,13 @@
           <p:nvPr/>
         </p:nvPicPr>
         <p:blipFill>
-          <a:blip r:embed="rId2">
+          <a:blip>
             <a:extLst>
               <a:ext uri="{28A0092B-C50C-407E-A947-70E740481C1C}">
                 <a14:useLocalDpi xmlns:a14="http://schemas.microsoft.com/office/drawing/2010/main" val="0"/>
               </a:ext>
               <a:ext uri="{96DAC541-7B7A-43D3-8B79-37D633B846F1}">
-                <asvg:svgBlip xmlns:asvg="http://schemas.microsoft.com/office/drawing/2016/SVG/main" r:embed="rId3"/>
+                <asvg:svgBlip xmlns:asvg="http://schemas.microsoft.com/office/drawing/2016/SVG/main" r:embed="rId2"/>
               </a:ext>
             </a:extLst>
           </a:blip>
@@ -6638,7 +6665,7 @@
                 <a:latin typeface="Hack" panose="020B0609030202020204" pitchFamily="49" charset="0"/>
                 <a:ea typeface="Hack" panose="020B0609030202020204" pitchFamily="49" charset="0"/>
                 <a:cs typeface="Hack" panose="020B0609030202020204" pitchFamily="49" charset="0"/>
-                <a:hlinkClick r:id="rId4"/>
+                <a:hlinkClick r:id="rId3"/>
               </a:rPr>
               <a:t>goto</a:t>
             </a:r>
@@ -6650,7 +6677,7 @@
                 <a:latin typeface="Hack" panose="020B0609030202020204" pitchFamily="49" charset="0"/>
                 <a:ea typeface="Hack" panose="020B0609030202020204" pitchFamily="49" charset="0"/>
                 <a:cs typeface="Hack" panose="020B0609030202020204" pitchFamily="49" charset="0"/>
-                <a:hlinkClick r:id="rId4"/>
+                <a:hlinkClick r:id="rId3"/>
               </a:rPr>
               <a:t> Program;</a:t>
             </a:r>
@@ -8584,18 +8611,18 @@
 </file>
 
 <file path=customXml/item1.xml><?xml version="1.0" encoding="utf-8"?>
-<p:properties xmlns:p="http://schemas.microsoft.com/office/2006/metadata/properties" xmlns:xsi="http://www.w3.org/2001/XMLSchema-instance" xmlns:pc="http://schemas.microsoft.com/office/infopath/2007/PartnerControls">
-  <documentManagement/>
-</p:properties>
-</file>
-
-<file path=customXml/item2.xml><?xml version="1.0" encoding="utf-8"?>
 <?mso-contentType ?>
 <FormTemplates xmlns="http://schemas.microsoft.com/sharepoint/v3/contenttype/forms">
   <Display>DocumentLibraryForm</Display>
   <Edit>DocumentLibraryForm</Edit>
   <New>DocumentLibraryForm</New>
 </FormTemplates>
+</file>
+
+<file path=customXml/item2.xml><?xml version="1.0" encoding="utf-8"?>
+<p:properties xmlns:p="http://schemas.microsoft.com/office/2006/metadata/properties" xmlns:xsi="http://www.w3.org/2001/XMLSchema-instance" xmlns:pc="http://schemas.microsoft.com/office/infopath/2007/PartnerControls">
+  <documentManagement/>
+</p:properties>
 </file>
 
 <file path=customXml/item3.xml><?xml version="1.0" encoding="utf-8"?>
@@ -8810,6 +8837,14 @@
 </file>
 
 <file path=customXml/itemProps1.xml><?xml version="1.0" encoding="utf-8"?>
+<ds:datastoreItem xmlns:ds="http://schemas.openxmlformats.org/officeDocument/2006/customXml" ds:itemID="{DCCAFC94-B532-41F6-8207-80CD8D96AE06}">
+  <ds:schemaRefs>
+    <ds:schemaRef ds:uri="http://schemas.microsoft.com/sharepoint/v3/contenttype/forms"/>
+  </ds:schemaRefs>
+</ds:datastoreItem>
+</file>
+
+<file path=customXml/itemProps2.xml><?xml version="1.0" encoding="utf-8"?>
 <ds:datastoreItem xmlns:ds="http://schemas.openxmlformats.org/officeDocument/2006/customXml" ds:itemID="{0C1047B0-43E4-4D37-AA49-058764EC8485}">
   <ds:schemaRefs>
     <ds:schemaRef ds:uri="http://schemas.microsoft.com/office/infopath/2007/PartnerControls"/>
@@ -8822,14 +8857,6 @@
     <ds:schemaRef ds:uri="http://schemas.microsoft.com/office/2006/metadata/properties"/>
     <ds:schemaRef ds:uri="http://www.w3.org/XML/1998/namespace"/>
     <ds:schemaRef ds:uri="http://purl.org/dc/dcmitype/"/>
-  </ds:schemaRefs>
-</ds:datastoreItem>
-</file>
-
-<file path=customXml/itemProps2.xml><?xml version="1.0" encoding="utf-8"?>
-<ds:datastoreItem xmlns:ds="http://schemas.openxmlformats.org/officeDocument/2006/customXml" ds:itemID="{DCCAFC94-B532-41F6-8207-80CD8D96AE06}">
-  <ds:schemaRefs>
-    <ds:schemaRef ds:uri="http://schemas.microsoft.com/sharepoint/v3/contenttype/forms"/>
   </ds:schemaRefs>
 </ds:datastoreItem>
 </file>
